--- a/exp/air_quality/air_tuning_report.pptx
+++ b/exp/air_quality/air_tuning_report.pptx
@@ -3999,24 +3999,6 @@
       </p:sp>
       <p:sp>
         <p:nvSpPr>
-          <p:cNvPr id="3" name="文本占位符 2"/>
-          <p:cNvSpPr>
-            <a:spLocks noGrp="1"/>
-          </p:cNvSpPr>
-          <p:nvPr>
-            <p:ph type="body" idx="1"/>
-          </p:nvPr>
-        </p:nvSpPr>
-        <p:spPr/>
-        <p:txBody>
-          <a:bodyPr/>
-          <a:p>
-            <a:endParaRPr lang="zh-CN" altLang="en-US"/>
-          </a:p>
-        </p:txBody>
-      </p:sp>
-      <p:sp>
-        <p:nvSpPr>
           <p:cNvPr id="4" name="文本框 3"/>
           <p:cNvSpPr txBox="1"/>
           <p:nvPr/>
@@ -4369,24 +4351,6 @@
       </p:sp>
       <p:sp>
         <p:nvSpPr>
-          <p:cNvPr id="3" name="文本占位符 2"/>
-          <p:cNvSpPr>
-            <a:spLocks noGrp="1"/>
-          </p:cNvSpPr>
-          <p:nvPr>
-            <p:ph type="body" idx="1"/>
-          </p:nvPr>
-        </p:nvSpPr>
-        <p:spPr/>
-        <p:txBody>
-          <a:bodyPr/>
-          <a:p>
-            <a:endParaRPr lang="zh-CN" altLang="en-US"/>
-          </a:p>
-        </p:txBody>
-      </p:sp>
-      <p:sp>
-        <p:nvSpPr>
           <p:cNvPr id="4" name="文本框 3"/>
           <p:cNvSpPr txBox="1"/>
           <p:nvPr/>
@@ -4616,24 +4580,6 @@
       </p:sp>
       <p:sp>
         <p:nvSpPr>
-          <p:cNvPr id="3" name="文本占位符 2"/>
-          <p:cNvSpPr>
-            <a:spLocks noGrp="1"/>
-          </p:cNvSpPr>
-          <p:nvPr>
-            <p:ph type="body" idx="1"/>
-          </p:nvPr>
-        </p:nvSpPr>
-        <p:spPr/>
-        <p:txBody>
-          <a:bodyPr/>
-          <a:p>
-            <a:endParaRPr lang="zh-CN" altLang="en-US"/>
-          </a:p>
-        </p:txBody>
-      </p:sp>
-      <p:sp>
-        <p:nvSpPr>
           <p:cNvPr id="4" name="文本框 3"/>
           <p:cNvSpPr txBox="1"/>
           <p:nvPr/>
@@ -4875,24 +4821,6 @@
           </a:p>
         </p:txBody>
       </p:sp>
-      <p:sp>
-        <p:nvSpPr>
-          <p:cNvPr id="3" name="文本占位符 2"/>
-          <p:cNvSpPr>
-            <a:spLocks noGrp="1"/>
-          </p:cNvSpPr>
-          <p:nvPr>
-            <p:ph type="body" idx="1"/>
-          </p:nvPr>
-        </p:nvSpPr>
-        <p:spPr/>
-        <p:txBody>
-          <a:bodyPr/>
-          <a:p>
-            <a:endParaRPr lang="zh-CN" altLang="en-US"/>
-          </a:p>
-        </p:txBody>
-      </p:sp>
       <p:pic>
         <p:nvPicPr>
           <p:cNvPr id="4" name="图片 3" descr="air_best_ce_by_scope"/>
@@ -4909,8 +4837,8 @@
         </p:blipFill>
         <p:spPr>
           <a:xfrm>
-            <a:off x="508000" y="1270000"/>
-            <a:ext cx="5334000" cy="3810000"/>
+            <a:off x="163195" y="1369060"/>
+            <a:ext cx="4057650" cy="2898775"/>
           </a:xfrm>
           <a:prstGeom prst="rect">
             <a:avLst/>
@@ -4933,8 +4861,8 @@
         </p:blipFill>
         <p:spPr>
           <a:xfrm>
-            <a:off x="6223000" y="1270000"/>
-            <a:ext cx="5334000" cy="3810000"/>
+            <a:off x="4304665" y="1369060"/>
+            <a:ext cx="3923665" cy="2802890"/>
           </a:xfrm>
           <a:prstGeom prst="rect">
             <a:avLst/>
@@ -4984,24 +4912,6 @@
               <a:latin typeface="微软雅黑" panose="020B0503020204020204" charset="-122"/>
               <a:ea typeface="微软雅黑" panose="020B0503020204020204" charset="-122"/>
             </a:endParaRPr>
-          </a:p>
-        </p:txBody>
-      </p:sp>
-      <p:sp>
-        <p:nvSpPr>
-          <p:cNvPr id="3" name="文本占位符 2"/>
-          <p:cNvSpPr>
-            <a:spLocks noGrp="1"/>
-          </p:cNvSpPr>
-          <p:nvPr>
-            <p:ph type="body" idx="1"/>
-          </p:nvPr>
-        </p:nvSpPr>
-        <p:spPr/>
-        <p:txBody>
-          <a:bodyPr/>
-          <a:p>
-            <a:endParaRPr lang="zh-CN" altLang="en-US"/>
           </a:p>
         </p:txBody>
       </p:sp>
